--- a/courses/479-fall-2026/479-lecture-8-seminar.pptx
+++ b/courses/479-fall-2026/479-lecture-8-seminar.pptx
@@ -35,9 +35,10 @@
     <p:sldId id="283" r:id="rId29"/>
     <p:sldId id="284" r:id="rId30"/>
     <p:sldId id="285" r:id="rId31"/>
+    <p:sldId id="286" r:id="rId32"/>
   </p:sldIdLst>
   <p:notesMasterIdLst>
-    <p:notesMasterId r:id="rId32"/>
+    <p:notesMasterId r:id="rId33"/>
   </p:notesMasterIdLst>
   <p:sldSz cx="12192000" cy="6858000"/>
   <p:notesSz cx="6858000" cy="12192000"/>
@@ -136,7 +137,7 @@
   <p:extLst>
     <p:ext uri="{521415D9-36F7-43E2-AB2F-B90AF26B5E84}">
       <p14:sectionLst xmlns:p14="http://schemas.microsoft.com/office/powerpoint/2010/main">
-        <p14:section name="Opening" id="{0e0c2e64-3741-7c5d-38b0-11d056d1b336}">
+        <p14:section name="Opening" id="{ed6906a2-1f9d-7874-3f79-8fbbff72d75f}">
           <p14:sldIdLst>
             <p14:sldId id="256"/>
             <p14:sldId id="257"/>
@@ -144,7 +145,7 @@
             <p14:sldId id="259"/>
           </p14:sldIdLst>
         </p14:section>
-        <p14:section name="I · Three senses of synthesis" id="{c033b065-f64f-b624-d004-19ae0ac74402}">
+        <p14:section name="I · Three senses of synthesis" id="{a7cd1760-b480-ab6e-02f4-140ab37ec026}">
           <p14:sldIdLst>
             <p14:sldId id="260"/>
             <p14:sldId id="261"/>
@@ -153,7 +154,7 @@
             <p14:sldId id="264"/>
           </p14:sldIdLst>
         </p14:section>
-        <p14:section name="II · The course as synthesis" id="{f30fd22c-368f-233e-0b0a-0e44ad935c3c}">
+        <p14:section name="II · The course as synthesis" id="{53ad5b3f-51e6-5098-61af-0706b3321c61}">
           <p14:sldIdLst>
             <p14:sldId id="265"/>
             <p14:sldId id="266"/>
@@ -165,7 +166,7 @@
             <p14:sldId id="272"/>
           </p14:sldIdLst>
         </p14:section>
-        <p14:section name="III · History as synthesis" id="{70759a3c-2163-25b4-41aa-209924dba764}">
+        <p14:section name="III · History as synthesis" id="{61328ec6-1b34-7d58-7a44-2000b8a7bad6}">
           <p14:sldIdLst>
             <p14:sldId id="273"/>
             <p14:sldId id="274"/>
@@ -174,7 +175,7 @@
             <p14:sldId id="277"/>
           </p14:sldIdLst>
         </p14:section>
-        <p14:section name="IV · The owl of Minerva" id="{36cbc577-9866-920e-4e8d-6273e8ca51ee}">
+        <p14:section name="IV · The owl of Minerva" id="{6ecb7280-b303-9342-71a5-1707ba4effe5}">
           <p14:sldIdLst>
             <p14:sldId id="278"/>
             <p14:sldId id="279"/>
@@ -182,12 +183,13 @@
             <p14:sldId id="281"/>
           </p14:sldIdLst>
         </p14:section>
-        <p14:section name="Discussion" id="{d350b5f1-fc8c-76c9-cde7-57c74092f402}">
+        <p14:section name="Discussion" id="{6278942d-9ae1-6d76-54db-c3ab4e1b0251}">
           <p14:sldIdLst>
             <p14:sldId id="282"/>
             <p14:sldId id="283"/>
             <p14:sldId id="284"/>
             <p14:sldId id="285"/>
+            <p14:sldId id="286"/>
           </p14:sldIdLst>
         </p14:section>
       </p14:sectionLst>
@@ -2481,9 +2483,7 @@
           <a:p>
             <a:r>
               <a:rPr lang="en-US" dirty="0"/>
-              <a:t>Q3 draws on the lecture's point that "Companies now are in charge of determining what 'human values' AI must conform to".
-Q4 is the lecture's own closing exercise ("Designing Curriculum for the Forthcoming Machine/Human Synthesis!"): "Does history have an arc or tendency? If so, is it something we can influence? And what role does technology – and machine learning – play?" and "What do machines still need to learn? What about humans? What will help us get there?"
-The lecture continues: "What would be the syllabus and / or curriculum for this ideal learning? How is our combined, synthetic knowledge limited? What – if anything – from our repetoire of concepts can steer us into the new horizons forecast by Braidotti, Katherine Hayles, Hui, Kalantzis &amp; Cope? Discuss!"</a:t>
+              <a:t>Q3 draws on the lecture's point that "Companies now are in charge of determining what 'human values' AI must conform to".</a:t>
             </a:r>
             <a:endParaRPr lang="en-US" dirty="0"/>
           </a:p>
@@ -2660,8 +2660,9 @@
           <a:p>
             <a:r>
               <a:rPr lang="en-US" dirty="0"/>
-              <a:t>Every entry is a work, author or earlier lecture the lecture names. Nothing has been added, so details such as full citations and years appear only where the lecture gives them (Marx, 1847; Katherine Hayles, 2024).
-The lecture also mentions Isaac Asimov and Philip K. Dick, in passing.</a:t>
+              <a:t>Q4 is the lecture's own closing exercise ("Designing Curriculum for the Forthcoming Machine/Human Synthesis!"): "Does history have an arc or tendency? If so, is it something we can influence? And what role does technology – and machine learning – play?" and "What do machines still need to learn? What about humans? What will help us get there?"
+The lecture continues: "What would be the syllabus and / or curriculum for this ideal learning? How is our combined, synthetic knowledge limited? What – if anything – from our repetoire of concepts can steer us into the new horizons forecast by Braidotti, Katherine Hayles, Hui, Kalantzis &amp; Cope? Discuss!"
+The figure is the lecture's concept-relations image. It numbers the course in eight weeks, as the lecture does.</a:t>
             </a:r>
             <a:endParaRPr lang="en-US" dirty="0"/>
           </a:p>
@@ -2685,6 +2686,95 @@
             <a:fld id="{F7021451-1387-4CA6-816F-3879F97B5CBC}" type="slidenum">
               <a:rPr lang="en-US"/>
               <a:t>30</a:t>
+            </a:fld>
+            <a:endParaRPr lang="en-US"/>
+          </a:p>
+        </p:txBody>
+      </p:sp>
+    </p:spTree>
+    <p:extLst>
+      <p:ext uri="{BB962C8B-B14F-4D97-AF65-F5344CB8AC3E}">
+        <p14:creationId xmlns:p14="http://schemas.microsoft.com/office/powerpoint/2010/main" val="1024086991"/>
+      </p:ext>
+    </p:extLst>
+  </p:cSld>
+  <p:clrMapOvr>
+    <a:masterClrMapping/>
+  </p:clrMapOvr>
+</p:notes>
+</file>
+
+<file path=ppt/notesSlides/notesSlide31.xml><?xml version="1.0" encoding="utf-8"?>
+<p:notes xmlns:a="http://schemas.openxmlformats.org/drawingml/2006/main" xmlns:r="http://schemas.openxmlformats.org/officeDocument/2006/relationships" xmlns:p="http://schemas.openxmlformats.org/presentationml/2006/main">
+  <p:cSld>
+    <p:spTree>
+      <p:nvGrpSpPr>
+        <p:cNvPr id="1" name=""/>
+        <p:cNvGrpSpPr/>
+        <p:nvPr/>
+      </p:nvGrpSpPr>
+      <p:grpSpPr>
+        <a:xfrm>
+          <a:off x="0" y="0"/>
+          <a:ext cx="0" cy="0"/>
+          <a:chOff x="0" y="0"/>
+          <a:chExt cx="0" cy="0"/>
+        </a:xfrm>
+      </p:grpSpPr>
+      <p:sp>
+        <p:nvSpPr>
+          <p:cNvPr id="2" name="Slide Image Placeholder 1"/>
+          <p:cNvSpPr>
+            <a:spLocks noGrp="1" noRot="1" noChangeAspect="1"/>
+          </p:cNvSpPr>
+          <p:nvPr>
+            <p:ph type="sldImg"/>
+          </p:nvPr>
+        </p:nvSpPr>
+        <p:spPr/>
+      </p:sp>
+      <p:sp>
+        <p:nvSpPr>
+          <p:cNvPr id="3" name="Notes Placeholder 2"/>
+          <p:cNvSpPr>
+            <a:spLocks noGrp="1"/>
+          </p:cNvSpPr>
+          <p:nvPr>
+            <p:ph type="body" idx="1"/>
+          </p:nvPr>
+        </p:nvSpPr>
+        <p:spPr/>
+        <p:txBody>
+          <a:bodyPr/>
+          <a:lstStyle/>
+          <a:p>
+            <a:r>
+              <a:rPr lang="en-US" dirty="0"/>
+              <a:t>Every entry is a work, author or earlier lecture the lecture names. Nothing has been added, so details such as full citations and years appear only where the lecture gives them (Marx, 1847; Katherine Hayles, 2024).
+The lecture also mentions Isaac Asimov and Philip K. Dick, in passing.</a:t>
+            </a:r>
+            <a:endParaRPr lang="en-US" dirty="0"/>
+          </a:p>
+        </p:txBody>
+      </p:sp>
+      <p:sp>
+        <p:nvSpPr>
+          <p:cNvPr id="4" name="Slide Number Placeholder 3"/>
+          <p:cNvSpPr>
+            <a:spLocks noGrp="1"/>
+          </p:cNvSpPr>
+          <p:nvPr>
+            <p:ph type="sldNum" sz="quarter" idx="10"/>
+          </p:nvPr>
+        </p:nvSpPr>
+        <p:spPr/>
+        <p:txBody>
+          <a:bodyPr/>
+          <a:lstStyle/>
+          <a:p>
+            <a:fld id="{F7021451-1387-4CA6-816F-3879F97B5CBC}" type="slidenum">
+              <a:rPr lang="en-US"/>
+              <a:t>31</a:t>
             </a:fld>
             <a:endParaRPr lang="en-US"/>
           </a:p>
@@ -4160,7 +4250,7 @@
                   <a:schemeClr val="accent6"/>
                 </a:solidFill>
               </a:rPr>
-              <a:t>EPOL 479  ·  Synthesis (Week 8)</a:t>
+              <a:t>EPOL 479  ·  Synthesis</a:t>
             </a:r>
             <a:endParaRPr lang="en-US" sz="2000" dirty="0"/>
           </a:p>
@@ -12171,7 +12261,7 @@
                   <a:schemeClr val="accent2"/>
                 </a:solidFill>
               </a:rPr>
-              <a:t>DISCUSSION · 3 AND 4</a:t>
+              <a:t>DISCUSSION · 3</a:t>
             </a:r>
             <a:endParaRPr lang="en-US" sz="1300" dirty="0"/>
           </a:p>
@@ -12223,7 +12313,7 @@
         </p:nvSpPr>
         <p:spPr>
           <a:xfrm>
-            <a:off x="822960" y="2011680"/>
+            <a:off x="822960" y="2194560"/>
             <a:ext cx="731520" cy="1737360"/>
           </a:xfrm>
           <a:prstGeom prst="rect">
@@ -12259,7 +12349,7 @@
         </p:nvSpPr>
         <p:spPr>
           <a:xfrm>
-            <a:off x="1737360" y="2011680"/>
+            <a:off x="1737360" y="2194560"/>
             <a:ext cx="9082735" cy="1737360"/>
           </a:xfrm>
           <a:prstGeom prst="rect">
@@ -12276,86 +12366,14 @@
               <a:buNone/>
             </a:pPr>
             <a:r>
-              <a:rPr lang="en-US" sz="2600" dirty="0">
+              <a:rPr lang="en-US" sz="3000" dirty="0">
                 <a:solidFill>
                   <a:schemeClr val="bg1"/>
                 </a:solidFill>
               </a:rPr>
               <a:t>If alignment is synthesis through discipline, whose “human values” are being synthesized, and is a refusal to align an “uneasy allyship”?</a:t>
             </a:r>
-            <a:endParaRPr lang="en-US" sz="2600" dirty="0"/>
-          </a:p>
-        </p:txBody>
-      </p:sp>
-      <p:sp>
-        <p:nvSpPr>
-          <p:cNvPr id="6" name="Text 4"/>
-          <p:cNvSpPr txBox="1"/>
-          <p:nvPr/>
-        </p:nvSpPr>
-        <p:spPr>
-          <a:xfrm>
-            <a:off x="822960" y="4069080"/>
-            <a:ext cx="731520" cy="1737360"/>
-          </a:xfrm>
-          <a:prstGeom prst="rect">
-            <a:avLst/>
-          </a:prstGeom>
-          <a:noFill/>
-          <a:ln/>
-        </p:spPr>
-        <p:txBody>
-          <a:bodyPr wrap="square" lIns="0" tIns="0" rIns="0" bIns="0" rtlCol="0" anchor="t"/>
-          <a:lstStyle/>
-          <a:p>
-            <a:pPr indent="0" marL="0">
-              <a:buNone/>
-            </a:pPr>
-            <a:r>
-              <a:rPr lang="en-US" sz="6000" dirty="0">
-                <a:solidFill>
-                  <a:schemeClr val="accent1"/>
-                </a:solidFill>
-              </a:rPr>
-              <a:t>4</a:t>
-            </a:r>
-            <a:endParaRPr lang="en-US" sz="6000" dirty="0"/>
-          </a:p>
-        </p:txBody>
-      </p:sp>
-      <p:sp>
-        <p:nvSpPr>
-          <p:cNvPr id="7" name="Text 5"/>
-          <p:cNvSpPr txBox="1"/>
-          <p:nvPr/>
-        </p:nvSpPr>
-        <p:spPr>
-          <a:xfrm>
-            <a:off x="1737360" y="4069080"/>
-            <a:ext cx="9082735" cy="1737360"/>
-          </a:xfrm>
-          <a:prstGeom prst="rect">
-            <a:avLst/>
-          </a:prstGeom>
-          <a:noFill/>
-          <a:ln/>
-        </p:spPr>
-        <p:txBody>
-          <a:bodyPr wrap="square" lIns="0" tIns="0" rIns="0" bIns="0" rtlCol="0" anchor="ctr"/>
-          <a:lstStyle/>
-          <a:p>
-            <a:pPr indent="0" marL="0">
-              <a:buNone/>
-            </a:pPr>
-            <a:r>
-              <a:rPr lang="en-US" sz="2600" dirty="0">
-                <a:solidFill>
-                  <a:schemeClr val="bg1"/>
-                </a:solidFill>
-              </a:rPr>
-              <a:t>Does history have an arc or tendency? If so, can we influence it? What do machines still need to learn? What about humans?</a:t>
-            </a:r>
-            <a:endParaRPr lang="en-US" sz="2600" dirty="0"/>
+            <a:endParaRPr lang="en-US" sz="3000" dirty="0"/>
           </a:p>
         </p:txBody>
       </p:sp>
@@ -12673,6 +12691,267 @@
                   <a:schemeClr val="accent2"/>
                 </a:solidFill>
               </a:rPr>
+              <a:t>DISCUSSION · 4</a:t>
+            </a:r>
+            <a:endParaRPr lang="en-US" sz="1300" dirty="0"/>
+          </a:p>
+        </p:txBody>
+      </p:sp>
+      <p:sp>
+        <p:nvSpPr>
+          <p:cNvPr id="3" name="Text 0"/>
+          <p:cNvSpPr/>
+          <p:nvPr>
+            <p:ph idx="100" type="title" hasCustomPrompt="1"/>
+          </p:nvPr>
+        </p:nvSpPr>
+        <p:spPr>
+          <a:xfrm>
+            <a:off x="822960" y="731520"/>
+            <a:ext cx="9631375" cy="868680"/>
+          </a:xfrm>
+          <a:prstGeom prst="rect">
+            <a:avLst/>
+          </a:prstGeom>
+          <a:noFill/>
+          <a:ln/>
+        </p:spPr>
+        <p:txBody>
+          <a:bodyPr wrap="square" lIns="0" tIns="0" rIns="0" bIns="0" rtlCol="0" anchor="t"/>
+          <a:lstStyle/>
+          <a:p>
+            <a:pPr algn="l" indent="0" marL="0">
+              <a:buNone/>
+            </a:pPr>
+            <a:r>
+              <a:rPr lang="en-US" sz="3800" dirty="0">
+                <a:solidFill>
+                  <a:schemeClr val="bg1"/>
+                </a:solidFill>
+              </a:rPr>
+              <a:t>The lecture's closing exercise</a:t>
+            </a:r>
+            <a:endParaRPr lang="en-US" sz="3800" dirty="0"/>
+          </a:p>
+        </p:txBody>
+      </p:sp>
+      <p:sp>
+        <p:nvSpPr>
+          <p:cNvPr id="4" name="lecture heading"/>
+          <p:cNvSpPr txBox="1"/>
+          <p:nvPr/>
+        </p:nvSpPr>
+        <p:spPr>
+          <a:xfrm>
+            <a:off x="822960" y="1783080"/>
+            <a:ext cx="10545775" cy="457200"/>
+          </a:xfrm>
+          <a:prstGeom prst="rect">
+            <a:avLst/>
+          </a:prstGeom>
+          <a:noFill/>
+          <a:ln/>
+        </p:spPr>
+        <p:txBody>
+          <a:bodyPr wrap="square" lIns="0" tIns="0" rIns="0" bIns="0" rtlCol="0" anchor="t"/>
+          <a:lstStyle/>
+          <a:p>
+            <a:pPr indent="0" marL="0">
+              <a:buNone/>
+            </a:pPr>
+            <a:r>
+              <a:rPr lang="en-US" sz="2200" i="1" dirty="0">
+                <a:solidFill>
+                  <a:schemeClr val="accent1"/>
+                </a:solidFill>
+              </a:rPr>
+              <a:t>Designing Curriculum for the Forthcoming Machine/Human Synthesis!</a:t>
+            </a:r>
+            <a:endParaRPr lang="en-US" sz="2200" dirty="0"/>
+          </a:p>
+        </p:txBody>
+      </p:sp>
+      <p:sp>
+        <p:nvSpPr>
+          <p:cNvPr id="5" name="closing questions"/>
+          <p:cNvSpPr txBox="1"/>
+          <p:nvPr/>
+        </p:nvSpPr>
+        <p:spPr>
+          <a:xfrm>
+            <a:off x="822960" y="2560320"/>
+            <a:ext cx="6035040" cy="3474720"/>
+          </a:xfrm>
+          <a:prstGeom prst="rect">
+            <a:avLst/>
+          </a:prstGeom>
+          <a:noFill/>
+          <a:ln/>
+        </p:spPr>
+        <p:txBody>
+          <a:bodyPr wrap="square" lIns="0" tIns="0" rIns="0" bIns="0" rtlCol="0" anchor="t"/>
+          <a:lstStyle/>
+          <a:p>
+            <a:pPr marL="342900" indent="-342900">
+              <a:spcAft>
+                <a:spcPts val="1800"/>
+              </a:spcAft>
+              <a:buSzPct val="100000"/>
+              <a:buFont typeface="+mj-lt"/>
+              <a:buAutoNum type="arabicPeriod" startAt="1"/>
+            </a:pPr>
+            <a:r>
+              <a:rPr lang="en-US" sz="2100" dirty="0">
+                <a:solidFill>
+                  <a:schemeClr val="bg1"/>
+                </a:solidFill>
+              </a:rPr>
+              <a:t>Does history have an arc or tendency? If so, is it something we can influence? And what role does technology – and machine learning – play?</a:t>
+            </a:r>
+            <a:endParaRPr lang="en-US" sz="2100" dirty="0"/>
+          </a:p>
+          <a:p>
+            <a:pPr marL="342900" indent="-342900">
+              <a:buSzPct val="100000"/>
+              <a:buFont typeface="+mj-lt"/>
+              <a:buAutoNum type="arabicPeriod" startAt="1"/>
+            </a:pPr>
+            <a:r>
+              <a:rPr lang="en-US" sz="2100" dirty="0">
+                <a:solidFill>
+                  <a:schemeClr val="bg1"/>
+                </a:solidFill>
+              </a:rPr>
+              <a:t>What do machines still need to learn? What about humans? What will help us get there?</a:t>
+            </a:r>
+            <a:endParaRPr lang="en-US" sz="2100" dirty="0"/>
+          </a:p>
+        </p:txBody>
+      </p:sp>
+      <p:pic>
+        <p:nvPicPr>
+          <p:cNvPr id="6" name="concept-relations" descr="The course's concepts on a circle around a child looking up at a star: Synthesis, Experience, Recognition, Attention, Consciousness, Alignment, Critique, and back to Synthesis.">    </p:cNvPr>
+          <p:cNvPicPr>
+            <a:picLocks noChangeAspect="1"/>
+          </p:cNvPicPr>
+          <p:nvPr/>
+        </p:nvPicPr>
+        <p:blipFill>
+          <a:blip r:embed="rId1"/>
+          <a:stretch>
+            <a:fillRect/>
+          </a:stretch>
+        </p:blipFill>
+        <p:spPr>
+          <a:xfrm>
+            <a:off x="7619695" y="2423160"/>
+            <a:ext cx="3749040" cy="3749040"/>
+          </a:xfrm>
+          <a:prstGeom prst="rect">
+            <a:avLst/>
+          </a:prstGeom>
+        </p:spPr>
+      </p:pic>
+      <p:sp>
+        <p:nvSpPr>
+          <p:cNvPr id="25" name="Slide Number Placeholder 0"/>
+          <p:cNvSpPr>
+            <a:spLocks noGrp="1"/>
+          </p:cNvSpPr>
+          <p:nvPr>
+            <p:ph type="sldNum" sz="quarter" idx="4294967295"/>
+          </p:nvPr>
+        </p:nvSpPr>
+        <p:spPr>
+          <a:xfrm>
+            <a:off x="10911535" y="6263640"/>
+            <a:ext cx="548640" cy="320040"/>
+          </a:xfrm>
+          <a:prstGeom prst="rect">
+            <a:avLst/>
+          </a:prstGeom>
+          <a:extLst>
+            <a:ext uri="{C572A759-6A51-4108-AA02-DFA0A04FC94B}">
+              <ma14:wrappingTextBoxFlag xmlns:ma14="http://schemas.microsoft.com/office/mac/drawingml/2011/main" val="0"/>
+            </a:ext>
+          </a:extLst>
+        </p:spPr>
+        <p:txBody>
+          <a:bodyPr/>
+          <a:lstStyle>
+            <a:lvl1pPr>
+              <a:defRPr sz="1100">
+                <a:solidFill>
+                  <a:srgbClr val="A49DB8"/>
+                </a:solidFill>
+              </a:defRPr>
+            </a:lvl1pPr>
+          </a:lstStyle>
+          <a:p>
+            <a:pPr algn="r"/>
+            <a:fld id="{F7021451-1387-4CA6-816F-3879F97B5CBC}" type="slidenum">
+              <a:rPr b="0" lang="en-US"/>
+              <a:t>30</a:t>
+            </a:fld>
+            <a:endParaRPr lang="en-US"/>
+          </a:p>
+        </p:txBody>
+      </p:sp>
+    </p:spTree>
+  </p:cSld>
+  <p:clrMapOvr>
+    <a:masterClrMapping/>
+  </p:clrMapOvr>
+</p:sld>
+</file>
+
+<file path=ppt/slides/slide31.xml><?xml version="1.0" encoding="utf-8"?>
+<p:sld xmlns:a="http://schemas.openxmlformats.org/drawingml/2006/main" xmlns:r="http://schemas.openxmlformats.org/officeDocument/2006/relationships" xmlns:p="http://schemas.openxmlformats.org/presentationml/2006/main">
+  <p:cSld name="Slide 31">
+    <p:spTree>
+      <p:nvGrpSpPr>
+        <p:cNvPr id="1" name=""/>
+        <p:cNvGrpSpPr/>
+        <p:nvPr/>
+      </p:nvGrpSpPr>
+      <p:grpSpPr>
+        <a:xfrm>
+          <a:off x="0" y="0"/>
+          <a:ext cx="0" cy="0"/>
+          <a:chOff x="0" y="0"/>
+          <a:chExt cx="0" cy="0"/>
+        </a:xfrm>
+      </p:grpSpPr>
+      <p:sp>
+        <p:nvSpPr>
+          <p:cNvPr id="2" name="kicker"/>
+          <p:cNvSpPr txBox="1"/>
+          <p:nvPr/>
+        </p:nvSpPr>
+        <p:spPr>
+          <a:xfrm>
+            <a:off x="822960" y="274320"/>
+            <a:ext cx="8229600" cy="320040"/>
+          </a:xfrm>
+          <a:prstGeom prst="rect">
+            <a:avLst/>
+          </a:prstGeom>
+          <a:noFill/>
+          <a:ln/>
+        </p:spPr>
+        <p:txBody>
+          <a:bodyPr wrap="square" lIns="0" tIns="0" rIns="0" bIns="0" rtlCol="0" anchor="t"/>
+          <a:lstStyle/>
+          <a:p>
+            <a:pPr indent="0" marL="0">
+              <a:buNone/>
+            </a:pPr>
+            <a:r>
+              <a:rPr lang="en-US" sz="1300" spc="400" kern="0" dirty="0">
+                <a:solidFill>
+                  <a:schemeClr val="accent2"/>
+                </a:solidFill>
+              </a:rPr>
               <a:t>AS NAMED IN THE LECTURE</a:t>
             </a:r>
             <a:endParaRPr lang="en-US" sz="1300" dirty="0"/>
@@ -12944,7 +13223,7 @@
             <a:pPr algn="r"/>
             <a:fld id="{F7021451-1387-4CA6-816F-3879F97B5CBC}" type="slidenum">
               <a:rPr b="0" lang="en-US"/>
-              <a:t>30</a:t>
+              <a:t>31</a:t>
             </a:fld>
             <a:endParaRPr lang="en-US"/>
           </a:p>
